--- a/01_폴더정리/다운로드/2026사업계획_draft_v2.pptx
+++ b/01_폴더정리/다운로드/2026사업계획_draft_v2.pptx
@@ -5,14 +5,13 @@
     <p:sldMasterId id="2147483648" r:id="rId1"/>
   </p:sldMasterIdLst>
   <p:sldIdLst>
-    <p:sldId id="256" r:id="rId7"/>
-    <p:sldId id="257" r:id="rId8"/>
-    <p:sldId id="258" r:id="rId9"/>
-    <p:sldId id="259" r:id="rId10"/>
-    <p:sldId id="260" r:id="rId11"/>
-    <p:sldId id="261" r:id="rId12"/>
+    <p:sldId id="256" r:id="rId2"/>
+    <p:sldId id="257" r:id="rId3"/>
+    <p:sldId id="259" r:id="rId4"/>
+    <p:sldId id="260" r:id="rId5"/>
+    <p:sldId id="261" r:id="rId6"/>
   </p:sldIdLst>
-  <p:sldSz cx="12191695" cy="6858000" type="screen4x3"/>
+  <p:sldSz cx="12192000" cy="6858000"/>
   <p:notesSz cx="6858000" cy="9144000"/>
   <p:defaultTextStyle>
     <a:defPPr>
@@ -109,6 +108,22 @@
       </a:defRPr>
     </a:lvl9pPr>
   </p:defaultTextStyle>
+  <p:extLst>
+    <p:ext uri="{EFAFB233-063F-42B5-8137-9DF3F51BA10A}">
+      <p15:sldGuideLst xmlns:p15="http://schemas.microsoft.com/office/powerpoint/2012/main">
+        <p15:guide id="1" orient="horz" pos="2160">
+          <p15:clr>
+            <a:srgbClr val="A4A3A4"/>
+          </p15:clr>
+        </p15:guide>
+        <p15:guide id="2" pos="2880">
+          <p15:clr>
+            <a:srgbClr val="A4A3A4"/>
+          </p15:clr>
+        </p15:guide>
+      </p15:sldGuideLst>
+    </p:ext>
+  </p:extLst>
 </p:presentation>
 </file>
 
@@ -293,7 +308,7 @@
           <a:p>
             <a:fld id="{5BCAD085-E8A6-8845-BD4E-CB4CCA059FC4}" type="datetimeFigureOut">
               <a:rPr lang="en-US" smtClean="0"/>
-              <a:t>1/27/13</a:t>
+              <a:t>4/14/2026</a:t>
             </a:fld>
             <a:endParaRPr lang="en-US"/>
           </a:p>
@@ -463,7 +478,7 @@
           <a:p>
             <a:fld id="{5BCAD085-E8A6-8845-BD4E-CB4CCA059FC4}" type="datetimeFigureOut">
               <a:rPr lang="en-US" smtClean="0"/>
-              <a:t>1/27/13</a:t>
+              <a:t>4/14/2026</a:t>
             </a:fld>
             <a:endParaRPr lang="en-US"/>
           </a:p>
@@ -643,7 +658,7 @@
           <a:p>
             <a:fld id="{5BCAD085-E8A6-8845-BD4E-CB4CCA059FC4}" type="datetimeFigureOut">
               <a:rPr lang="en-US" smtClean="0"/>
-              <a:t>1/27/13</a:t>
+              <a:t>4/14/2026</a:t>
             </a:fld>
             <a:endParaRPr lang="en-US"/>
           </a:p>
@@ -813,7 +828,7 @@
           <a:p>
             <a:fld id="{5BCAD085-E8A6-8845-BD4E-CB4CCA059FC4}" type="datetimeFigureOut">
               <a:rPr lang="en-US" smtClean="0"/>
-              <a:t>1/27/13</a:t>
+              <a:t>4/14/2026</a:t>
             </a:fld>
             <a:endParaRPr lang="en-US"/>
           </a:p>
@@ -1059,7 +1074,7 @@
           <a:p>
             <a:fld id="{5BCAD085-E8A6-8845-BD4E-CB4CCA059FC4}" type="datetimeFigureOut">
               <a:rPr lang="en-US" smtClean="0"/>
-              <a:t>1/27/13</a:t>
+              <a:t>4/14/2026</a:t>
             </a:fld>
             <a:endParaRPr lang="en-US"/>
           </a:p>
@@ -1347,7 +1362,7 @@
           <a:p>
             <a:fld id="{5BCAD085-E8A6-8845-BD4E-CB4CCA059FC4}" type="datetimeFigureOut">
               <a:rPr lang="en-US" smtClean="0"/>
-              <a:t>1/27/13</a:t>
+              <a:t>4/14/2026</a:t>
             </a:fld>
             <a:endParaRPr lang="en-US"/>
           </a:p>
@@ -1769,7 +1784,7 @@
           <a:p>
             <a:fld id="{5BCAD085-E8A6-8845-BD4E-CB4CCA059FC4}" type="datetimeFigureOut">
               <a:rPr lang="en-US" smtClean="0"/>
-              <a:t>1/27/13</a:t>
+              <a:t>4/14/2026</a:t>
             </a:fld>
             <a:endParaRPr lang="en-US"/>
           </a:p>
@@ -1887,7 +1902,7 @@
           <a:p>
             <a:fld id="{5BCAD085-E8A6-8845-BD4E-CB4CCA059FC4}" type="datetimeFigureOut">
               <a:rPr lang="en-US" smtClean="0"/>
-              <a:t>1/27/13</a:t>
+              <a:t>4/14/2026</a:t>
             </a:fld>
             <a:endParaRPr lang="en-US"/>
           </a:p>
@@ -1982,7 +1997,7 @@
           <a:p>
             <a:fld id="{5BCAD085-E8A6-8845-BD4E-CB4CCA059FC4}" type="datetimeFigureOut">
               <a:rPr lang="en-US" smtClean="0"/>
-              <a:t>1/27/13</a:t>
+              <a:t>4/14/2026</a:t>
             </a:fld>
             <a:endParaRPr lang="en-US"/>
           </a:p>
@@ -2259,7 +2274,7 @@
           <a:p>
             <a:fld id="{5BCAD085-E8A6-8845-BD4E-CB4CCA059FC4}" type="datetimeFigureOut">
               <a:rPr lang="en-US" smtClean="0"/>
-              <a:t>1/27/13</a:t>
+              <a:t>4/14/2026</a:t>
             </a:fld>
             <a:endParaRPr lang="en-US"/>
           </a:p>
@@ -2512,7 +2527,7 @@
           <a:p>
             <a:fld id="{5BCAD085-E8A6-8845-BD4E-CB4CCA059FC4}" type="datetimeFigureOut">
               <a:rPr lang="en-US" smtClean="0"/>
-              <a:t>1/27/13</a:t>
+              <a:t>4/14/2026</a:t>
             </a:fld>
             <a:endParaRPr lang="en-US"/>
           </a:p>
@@ -2725,7 +2740,7 @@
           <a:p>
             <a:fld id="{5BCAD085-E8A6-8845-BD4E-CB4CCA059FC4}" type="datetimeFigureOut">
               <a:rPr lang="en-US" smtClean="0"/>
-              <a:t>1/27/13</a:t>
+              <a:t>4/14/2026</a:t>
             </a:fld>
             <a:endParaRPr lang="en-US"/>
           </a:p>
@@ -3084,7 +3099,7 @@
 </file>
 
 <file path=ppt/slides/slide1.xml><?xml version="1.0" encoding="utf-8"?>
-<p:sld xmlns:a="http://schemas.openxmlformats.org/drawingml/2006/main" xmlns:p="http://schemas.openxmlformats.org/presentationml/2006/main" xmlns:r="http://schemas.openxmlformats.org/officeDocument/2006/relationships">
+<p:sld xmlns:a="http://schemas.openxmlformats.org/drawingml/2006/main" xmlns:r="http://schemas.openxmlformats.org/officeDocument/2006/relationships" xmlns:p="http://schemas.openxmlformats.org/presentationml/2006/main">
   <p:cSld>
     <p:spTree>
       <p:nvGrpSpPr>
@@ -3092,7 +3107,14 @@
         <p:cNvGrpSpPr/>
         <p:nvPr/>
       </p:nvGrpSpPr>
-      <p:grpSpPr/>
+      <p:grpSpPr>
+        <a:xfrm>
+          <a:off x="0" y="0"/>
+          <a:ext cx="0" cy="0"/>
+          <a:chOff x="0" y="0"/>
+          <a:chExt cx="0" cy="0"/>
+        </a:xfrm>
+      </p:grpSpPr>
       <p:sp>
         <p:nvSpPr>
           <p:cNvPr id="2" name="Title 1"/>
@@ -3149,7 +3171,7 @@
 </file>
 
 <file path=ppt/slides/slide2.xml><?xml version="1.0" encoding="utf-8"?>
-<p:sld xmlns:a="http://schemas.openxmlformats.org/drawingml/2006/main" xmlns:p="http://schemas.openxmlformats.org/presentationml/2006/main" xmlns:r="http://schemas.openxmlformats.org/officeDocument/2006/relationships">
+<p:sld xmlns:a="http://schemas.openxmlformats.org/drawingml/2006/main" xmlns:r="http://schemas.openxmlformats.org/officeDocument/2006/relationships" xmlns:p="http://schemas.openxmlformats.org/presentationml/2006/main">
   <p:cSld>
     <p:spTree>
       <p:nvGrpSpPr>
@@ -3157,7 +3179,14 @@
         <p:cNvGrpSpPr/>
         <p:nvPr/>
       </p:nvGrpSpPr>
-      <p:grpSpPr/>
+      <p:grpSpPr>
+        <a:xfrm>
+          <a:off x="0" y="0"/>
+          <a:ext cx="0" cy="0"/>
+          <a:chOff x="0" y="0"/>
+          <a:chExt cx="0" cy="0"/>
+        </a:xfrm>
+      </p:grpSpPr>
       <p:sp>
         <p:nvSpPr>
           <p:cNvPr id="2" name="Title 1"/>
@@ -3239,7 +3268,7 @@
 </file>
 
 <file path=ppt/slides/slide3.xml><?xml version="1.0" encoding="utf-8"?>
-<p:sld xmlns:a="http://schemas.openxmlformats.org/drawingml/2006/main" xmlns:p="http://schemas.openxmlformats.org/presentationml/2006/main" xmlns:r="http://schemas.openxmlformats.org/officeDocument/2006/relationships">
+<p:sld xmlns:a="http://schemas.openxmlformats.org/drawingml/2006/main" xmlns:r="http://schemas.openxmlformats.org/officeDocument/2006/relationships" xmlns:p="http://schemas.openxmlformats.org/presentationml/2006/main">
   <p:cSld>
     <p:spTree>
       <p:nvGrpSpPr>
@@ -3247,7 +3276,14 @@
         <p:cNvGrpSpPr/>
         <p:nvPr/>
       </p:nvGrpSpPr>
-      <p:grpSpPr/>
+      <p:grpSpPr>
+        <a:xfrm>
+          <a:off x="0" y="0"/>
+          <a:ext cx="0" cy="0"/>
+          <a:chOff x="0" y="0"/>
+          <a:chExt cx="0" cy="0"/>
+        </a:xfrm>
+      </p:grpSpPr>
       <p:sp>
         <p:nvSpPr>
           <p:cNvPr id="2" name="Title 1"/>
@@ -3264,7 +3300,7 @@
           <a:lstStyle/>
           <a:p>
             <a:r>
-              <a:t>2025년 실적 요약</a:t>
+              <a:t>시장 환경 분석</a:t>
             </a:r>
           </a:p>
         </p:txBody>
@@ -3281,36 +3317,51 @@
         </p:nvSpPr>
         <p:spPr/>
         <p:txBody>
-          <a:bodyPr/>
-          <a:lstStyle/>
-          <a:p>
-            <a:r>
-              <a:t>• 매출: 42억원 (전년 대비 +12%)</a:t>
-            </a:r>
-          </a:p>
-          <a:p>
-            <a:r>
-              <a:t>• 영업이익: 6.3억원 (이익률 15%)</a:t>
-            </a:r>
-          </a:p>
-          <a:p>
-            <a:r>
-              <a:t>• 신규 고객: 23개사 (목표 20개사 대비 115% 달성)</a:t>
-            </a:r>
-          </a:p>
-          <a:p>
-            <a:r>
-              <a:t>• 기존 고객 재계약률: 92%</a:t>
-            </a:r>
-          </a:p>
-          <a:p>
-            <a:r>
-              <a:t>• 해외매출 비중: 16% (전년 11%에서 성장)</a:t>
-            </a:r>
-          </a:p>
-          <a:p>
-            <a:r>
-              <a:t>• 직원 수: 48명 → 56명 (+17%)</a:t>
+          <a:bodyPr>
+            <a:normAutofit fontScale="92500" lnSpcReduction="20000"/>
+          </a:bodyPr>
+          <a:lstStyle/>
+          <a:p>
+            <a:r>
+              <a:t>기회 요인:</a:t>
+            </a:r>
+          </a:p>
+          <a:p>
+            <a:r>
+              <a:t>• AI/자동화 시장 연평균 35% 성장</a:t>
+            </a:r>
+          </a:p>
+          <a:p>
+            <a:r>
+              <a:t>• 기업 DX 투자 확대 추세</a:t>
+            </a:r>
+          </a:p>
+          <a:p>
+            <a:r>
+              <a:t>• 정부 AI 바우처 사업 확대</a:t>
+            </a:r>
+          </a:p>
+          <a:p>
+            <a:endParaRPr/>
+          </a:p>
+          <a:p>
+            <a:r>
+              <a:t>위협 요인:</a:t>
+            </a:r>
+          </a:p>
+          <a:p>
+            <a:r>
+              <a:t>• 대기업 시장 진입 (삼성SDS, LG CNS)</a:t>
+            </a:r>
+          </a:p>
+          <a:p>
+            <a:r>
+              <a:t>• 글로벌 SaaS 경쟁 심화</a:t>
+            </a:r>
+          </a:p>
+          <a:p>
+            <a:r>
+              <a:t>• 인력 확보 경쟁 치열</a:t>
             </a:r>
           </a:p>
         </p:txBody>
@@ -3324,7 +3375,7 @@
 </file>
 
 <file path=ppt/slides/slide4.xml><?xml version="1.0" encoding="utf-8"?>
-<p:sld xmlns:a="http://schemas.openxmlformats.org/drawingml/2006/main" xmlns:p="http://schemas.openxmlformats.org/presentationml/2006/main" xmlns:r="http://schemas.openxmlformats.org/officeDocument/2006/relationships">
+<p:sld xmlns:a="http://schemas.openxmlformats.org/drawingml/2006/main" xmlns:r="http://schemas.openxmlformats.org/officeDocument/2006/relationships" xmlns:p="http://schemas.openxmlformats.org/presentationml/2006/main">
   <p:cSld>
     <p:spTree>
       <p:nvGrpSpPr>
@@ -3332,7 +3383,14 @@
         <p:cNvGrpSpPr/>
         <p:nvPr/>
       </p:nvGrpSpPr>
-      <p:grpSpPr/>
+      <p:grpSpPr>
+        <a:xfrm>
+          <a:off x="0" y="0"/>
+          <a:ext cx="0" cy="0"/>
+          <a:chOff x="0" y="0"/>
+          <a:chExt cx="0" cy="0"/>
+        </a:xfrm>
+      </p:grpSpPr>
       <p:sp>
         <p:nvSpPr>
           <p:cNvPr id="2" name="Title 1"/>
@@ -3349,7 +3407,7 @@
           <a:lstStyle/>
           <a:p>
             <a:r>
-              <a:t>시장 환경 분석</a:t>
+              <a:t>2026년 사업 목표</a:t>
             </a:r>
           </a:p>
         </p:txBody>
@@ -3366,47 +3424,51 @@
         </p:nvSpPr>
         <p:spPr/>
         <p:txBody>
-          <a:bodyPr/>
-          <a:lstStyle/>
-          <a:p>
-            <a:r>
-              <a:t>기회 요인:</a:t>
-            </a:r>
-          </a:p>
-          <a:p>
-            <a:r>
-              <a:t>• AI/자동화 시장 연평균 35% 성장</a:t>
-            </a:r>
-          </a:p>
-          <a:p>
-            <a:r>
-              <a:t>• 기업 DX 투자 확대 추세</a:t>
-            </a:r>
-          </a:p>
-          <a:p>
-            <a:r>
-              <a:t>• 정부 AI 바우처 사업 확대</a:t>
-            </a:r>
-          </a:p>
-          <a:p/>
-          <a:p>
-            <a:r>
-              <a:t>위협 요인:</a:t>
-            </a:r>
-          </a:p>
-          <a:p>
-            <a:r>
-              <a:t>• 대기업 시장 진입 (삼성SDS, LG CNS)</a:t>
-            </a:r>
-          </a:p>
-          <a:p>
-            <a:r>
-              <a:t>• 글로벌 SaaS 경쟁 심화</a:t>
-            </a:r>
-          </a:p>
-          <a:p>
-            <a:r>
-              <a:t>• 인력 확보 경쟁 치열</a:t>
+          <a:bodyPr>
+            <a:normAutofit fontScale="92500" lnSpcReduction="20000"/>
+          </a:bodyPr>
+          <a:lstStyle/>
+          <a:p>
+            <a:r>
+              <a:t>매출 목표: 50억원 (+19%)</a:t>
+            </a:r>
+          </a:p>
+          <a:p>
+            <a:r>
+              <a:t>영업이익 목표: 8억원 (이익률 16%)</a:t>
+            </a:r>
+          </a:p>
+          <a:p>
+            <a:r>
+              <a:t>신규 고객: 30개사</a:t>
+            </a:r>
+          </a:p>
+          <a:p>
+            <a:r>
+              <a:t>해외매출 비중: 20%</a:t>
+            </a:r>
+          </a:p>
+          <a:p>
+            <a:endParaRPr/>
+          </a:p>
+          <a:p>
+            <a:r>
+              <a:t>핵심 전략:</a:t>
+            </a:r>
+          </a:p>
+          <a:p>
+            <a:r>
+              <a:t>1. AI 솔루션 신사업 런칭</a:t>
+            </a:r>
+          </a:p>
+          <a:p>
+            <a:r>
+              <a:t>2. 중견기업 시장 집중 공략</a:t>
+            </a:r>
+          </a:p>
+          <a:p>
+            <a:r>
+              <a:t>3. 파트너 생태계 확대</a:t>
             </a:r>
           </a:p>
         </p:txBody>
@@ -3420,7 +3482,7 @@
 </file>
 
 <file path=ppt/slides/slide5.xml><?xml version="1.0" encoding="utf-8"?>
-<p:sld xmlns:a="http://schemas.openxmlformats.org/drawingml/2006/main" xmlns:p="http://schemas.openxmlformats.org/presentationml/2006/main" xmlns:r="http://schemas.openxmlformats.org/officeDocument/2006/relationships">
+<p:sld xmlns:a="http://schemas.openxmlformats.org/drawingml/2006/main" xmlns:r="http://schemas.openxmlformats.org/officeDocument/2006/relationships" xmlns:p="http://schemas.openxmlformats.org/presentationml/2006/main">
   <p:cSld>
     <p:spTree>
       <p:nvGrpSpPr>
@@ -3428,7 +3490,14 @@
         <p:cNvGrpSpPr/>
         <p:nvPr/>
       </p:nvGrpSpPr>
-      <p:grpSpPr/>
+      <p:grpSpPr>
+        <a:xfrm>
+          <a:off x="0" y="0"/>
+          <a:ext cx="0" cy="0"/>
+          <a:chOff x="0" y="0"/>
+          <a:chExt cx="0" cy="0"/>
+        </a:xfrm>
+      </p:grpSpPr>
       <p:sp>
         <p:nvSpPr>
           <p:cNvPr id="2" name="Title 1"/>
@@ -3445,7 +3514,7 @@
           <a:lstStyle/>
           <a:p>
             <a:r>
-              <a:t>2026년 사업 목표</a:t>
+              <a:t>투자 계획</a:t>
             </a:r>
           </a:p>
         </p:txBody>
@@ -3466,102 +3535,6 @@
           <a:lstStyle/>
           <a:p>
             <a:r>
-              <a:t>매출 목표: 50억원 (+19%)</a:t>
-            </a:r>
-          </a:p>
-          <a:p>
-            <a:r>
-              <a:t>영업이익 목표: 8억원 (이익률 16%)</a:t>
-            </a:r>
-          </a:p>
-          <a:p>
-            <a:r>
-              <a:t>신규 고객: 30개사</a:t>
-            </a:r>
-          </a:p>
-          <a:p>
-            <a:r>
-              <a:t>해외매출 비중: 20%</a:t>
-            </a:r>
-          </a:p>
-          <a:p/>
-          <a:p>
-            <a:r>
-              <a:t>핵심 전략:</a:t>
-            </a:r>
-          </a:p>
-          <a:p>
-            <a:r>
-              <a:t>1. AI 솔루션 신사업 런칭</a:t>
-            </a:r>
-          </a:p>
-          <a:p>
-            <a:r>
-              <a:t>2. 중견기업 시장 집중 공략</a:t>
-            </a:r>
-          </a:p>
-          <a:p>
-            <a:r>
-              <a:t>3. 파트너 생태계 확대</a:t>
-            </a:r>
-          </a:p>
-        </p:txBody>
-      </p:sp>
-    </p:spTree>
-  </p:cSld>
-  <p:clrMapOvr>
-    <a:masterClrMapping/>
-  </p:clrMapOvr>
-</p:sld>
-</file>
-
-<file path=ppt/slides/slide6.xml><?xml version="1.0" encoding="utf-8"?>
-<p:sld xmlns:a="http://schemas.openxmlformats.org/drawingml/2006/main" xmlns:p="http://schemas.openxmlformats.org/presentationml/2006/main" xmlns:r="http://schemas.openxmlformats.org/officeDocument/2006/relationships">
-  <p:cSld>
-    <p:spTree>
-      <p:nvGrpSpPr>
-        <p:cNvPr id="1" name=""/>
-        <p:cNvGrpSpPr/>
-        <p:nvPr/>
-      </p:nvGrpSpPr>
-      <p:grpSpPr/>
-      <p:sp>
-        <p:nvSpPr>
-          <p:cNvPr id="2" name="Title 1"/>
-          <p:cNvSpPr>
-            <a:spLocks noGrp="1"/>
-          </p:cNvSpPr>
-          <p:nvPr>
-            <p:ph type="title"/>
-          </p:nvPr>
-        </p:nvSpPr>
-        <p:spPr/>
-        <p:txBody>
-          <a:bodyPr/>
-          <a:lstStyle/>
-          <a:p>
-            <a:r>
-              <a:t>투자 계획</a:t>
-            </a:r>
-          </a:p>
-        </p:txBody>
-      </p:sp>
-      <p:sp>
-        <p:nvSpPr>
-          <p:cNvPr id="3" name="Content Placeholder 2"/>
-          <p:cNvSpPr>
-            <a:spLocks noGrp="1"/>
-          </p:cNvSpPr>
-          <p:nvPr>
-            <p:ph idx="1"/>
-          </p:nvPr>
-        </p:nvSpPr>
-        <p:spPr/>
-        <p:txBody>
-          <a:bodyPr/>
-          <a:lstStyle/>
-          <a:p>
-            <a:r>
               <a:t>• R&amp;D: 8억원 (AI 플랫폼 개발)</a:t>
             </a:r>
           </a:p>
@@ -3580,7 +3553,9 @@
               <a:t>• 인프라: 1.5억원 (클라우드 전환)</a:t>
             </a:r>
           </a:p>
-          <a:p/>
+          <a:p>
+            <a:endParaRPr/>
+          </a:p>
           <a:p>
             <a:r>
               <a:t>총 투자 규모: 11.5억원</a:t>

--- a/01_폴더정리/다운로드/2026사업계획_draft_v2.pptx
+++ b/01_폴더정리/다운로드/2026사업계획_draft_v2.pptx
@@ -5,13 +5,14 @@
     <p:sldMasterId id="2147483648" r:id="rId1"/>
   </p:sldMasterIdLst>
   <p:sldIdLst>
-    <p:sldId id="256" r:id="rId2"/>
-    <p:sldId id="257" r:id="rId3"/>
-    <p:sldId id="259" r:id="rId4"/>
-    <p:sldId id="260" r:id="rId5"/>
-    <p:sldId id="261" r:id="rId6"/>
+    <p:sldId id="256" r:id="rId7"/>
+    <p:sldId id="257" r:id="rId8"/>
+    <p:sldId id="258" r:id="rId9"/>
+    <p:sldId id="259" r:id="rId10"/>
+    <p:sldId id="260" r:id="rId11"/>
+    <p:sldId id="261" r:id="rId12"/>
   </p:sldIdLst>
-  <p:sldSz cx="12192000" cy="6858000"/>
+  <p:sldSz cx="12191695" cy="6858000" type="screen4x3"/>
   <p:notesSz cx="6858000" cy="9144000"/>
   <p:defaultTextStyle>
     <a:defPPr>
@@ -108,22 +109,6 @@
       </a:defRPr>
     </a:lvl9pPr>
   </p:defaultTextStyle>
-  <p:extLst>
-    <p:ext uri="{EFAFB233-063F-42B5-8137-9DF3F51BA10A}">
-      <p15:sldGuideLst xmlns:p15="http://schemas.microsoft.com/office/powerpoint/2012/main">
-        <p15:guide id="1" orient="horz" pos="2160">
-          <p15:clr>
-            <a:srgbClr val="A4A3A4"/>
-          </p15:clr>
-        </p15:guide>
-        <p15:guide id="2" pos="2880">
-          <p15:clr>
-            <a:srgbClr val="A4A3A4"/>
-          </p15:clr>
-        </p15:guide>
-      </p15:sldGuideLst>
-    </p:ext>
-  </p:extLst>
 </p:presentation>
 </file>
 
@@ -308,7 +293,7 @@
           <a:p>
             <a:fld id="{5BCAD085-E8A6-8845-BD4E-CB4CCA059FC4}" type="datetimeFigureOut">
               <a:rPr lang="en-US" smtClean="0"/>
-              <a:t>4/14/2026</a:t>
+              <a:t>1/27/13</a:t>
             </a:fld>
             <a:endParaRPr lang="en-US"/>
           </a:p>
@@ -478,7 +463,7 @@
           <a:p>
             <a:fld id="{5BCAD085-E8A6-8845-BD4E-CB4CCA059FC4}" type="datetimeFigureOut">
               <a:rPr lang="en-US" smtClean="0"/>
-              <a:t>4/14/2026</a:t>
+              <a:t>1/27/13</a:t>
             </a:fld>
             <a:endParaRPr lang="en-US"/>
           </a:p>
@@ -658,7 +643,7 @@
           <a:p>
             <a:fld id="{5BCAD085-E8A6-8845-BD4E-CB4CCA059FC4}" type="datetimeFigureOut">
               <a:rPr lang="en-US" smtClean="0"/>
-              <a:t>4/14/2026</a:t>
+              <a:t>1/27/13</a:t>
             </a:fld>
             <a:endParaRPr lang="en-US"/>
           </a:p>
@@ -828,7 +813,7 @@
           <a:p>
             <a:fld id="{5BCAD085-E8A6-8845-BD4E-CB4CCA059FC4}" type="datetimeFigureOut">
               <a:rPr lang="en-US" smtClean="0"/>
-              <a:t>4/14/2026</a:t>
+              <a:t>1/27/13</a:t>
             </a:fld>
             <a:endParaRPr lang="en-US"/>
           </a:p>
@@ -1074,7 +1059,7 @@
           <a:p>
             <a:fld id="{5BCAD085-E8A6-8845-BD4E-CB4CCA059FC4}" type="datetimeFigureOut">
               <a:rPr lang="en-US" smtClean="0"/>
-              <a:t>4/14/2026</a:t>
+              <a:t>1/27/13</a:t>
             </a:fld>
             <a:endParaRPr lang="en-US"/>
           </a:p>
@@ -1362,7 +1347,7 @@
           <a:p>
             <a:fld id="{5BCAD085-E8A6-8845-BD4E-CB4CCA059FC4}" type="datetimeFigureOut">
               <a:rPr lang="en-US" smtClean="0"/>
-              <a:t>4/14/2026</a:t>
+              <a:t>1/27/13</a:t>
             </a:fld>
             <a:endParaRPr lang="en-US"/>
           </a:p>
@@ -1784,7 +1769,7 @@
           <a:p>
             <a:fld id="{5BCAD085-E8A6-8845-BD4E-CB4CCA059FC4}" type="datetimeFigureOut">
               <a:rPr lang="en-US" smtClean="0"/>
-              <a:t>4/14/2026</a:t>
+              <a:t>1/27/13</a:t>
             </a:fld>
             <a:endParaRPr lang="en-US"/>
           </a:p>
@@ -1902,7 +1887,7 @@
           <a:p>
             <a:fld id="{5BCAD085-E8A6-8845-BD4E-CB4CCA059FC4}" type="datetimeFigureOut">
               <a:rPr lang="en-US" smtClean="0"/>
-              <a:t>4/14/2026</a:t>
+              <a:t>1/27/13</a:t>
             </a:fld>
             <a:endParaRPr lang="en-US"/>
           </a:p>
@@ -1997,7 +1982,7 @@
           <a:p>
             <a:fld id="{5BCAD085-E8A6-8845-BD4E-CB4CCA059FC4}" type="datetimeFigureOut">
               <a:rPr lang="en-US" smtClean="0"/>
-              <a:t>4/14/2026</a:t>
+              <a:t>1/27/13</a:t>
             </a:fld>
             <a:endParaRPr lang="en-US"/>
           </a:p>
@@ -2274,7 +2259,7 @@
           <a:p>
             <a:fld id="{5BCAD085-E8A6-8845-BD4E-CB4CCA059FC4}" type="datetimeFigureOut">
               <a:rPr lang="en-US" smtClean="0"/>
-              <a:t>4/14/2026</a:t>
+              <a:t>1/27/13</a:t>
             </a:fld>
             <a:endParaRPr lang="en-US"/>
           </a:p>
@@ -2527,7 +2512,7 @@
           <a:p>
             <a:fld id="{5BCAD085-E8A6-8845-BD4E-CB4CCA059FC4}" type="datetimeFigureOut">
               <a:rPr lang="en-US" smtClean="0"/>
-              <a:t>4/14/2026</a:t>
+              <a:t>1/27/13</a:t>
             </a:fld>
             <a:endParaRPr lang="en-US"/>
           </a:p>
@@ -2740,7 +2725,7 @@
           <a:p>
             <a:fld id="{5BCAD085-E8A6-8845-BD4E-CB4CCA059FC4}" type="datetimeFigureOut">
               <a:rPr lang="en-US" smtClean="0"/>
-              <a:t>4/14/2026</a:t>
+              <a:t>1/27/13</a:t>
             </a:fld>
             <a:endParaRPr lang="en-US"/>
           </a:p>
@@ -3099,7 +3084,7 @@
 </file>
 
 <file path=ppt/slides/slide1.xml><?xml version="1.0" encoding="utf-8"?>
-<p:sld xmlns:a="http://schemas.openxmlformats.org/drawingml/2006/main" xmlns:r="http://schemas.openxmlformats.org/officeDocument/2006/relationships" xmlns:p="http://schemas.openxmlformats.org/presentationml/2006/main">
+<p:sld xmlns:a="http://schemas.openxmlformats.org/drawingml/2006/main" xmlns:p="http://schemas.openxmlformats.org/presentationml/2006/main" xmlns:r="http://schemas.openxmlformats.org/officeDocument/2006/relationships">
   <p:cSld>
     <p:spTree>
       <p:nvGrpSpPr>
@@ -3107,14 +3092,7 @@
         <p:cNvGrpSpPr/>
         <p:nvPr/>
       </p:nvGrpSpPr>
-      <p:grpSpPr>
-        <a:xfrm>
-          <a:off x="0" y="0"/>
-          <a:ext cx="0" cy="0"/>
-          <a:chOff x="0" y="0"/>
-          <a:chExt cx="0" cy="0"/>
-        </a:xfrm>
-      </p:grpSpPr>
+      <p:grpSpPr/>
       <p:sp>
         <p:nvSpPr>
           <p:cNvPr id="2" name="Title 1"/>
@@ -3171,7 +3149,7 @@
 </file>
 
 <file path=ppt/slides/slide2.xml><?xml version="1.0" encoding="utf-8"?>
-<p:sld xmlns:a="http://schemas.openxmlformats.org/drawingml/2006/main" xmlns:r="http://schemas.openxmlformats.org/officeDocument/2006/relationships" xmlns:p="http://schemas.openxmlformats.org/presentationml/2006/main">
+<p:sld xmlns:a="http://schemas.openxmlformats.org/drawingml/2006/main" xmlns:p="http://schemas.openxmlformats.org/presentationml/2006/main" xmlns:r="http://schemas.openxmlformats.org/officeDocument/2006/relationships">
   <p:cSld>
     <p:spTree>
       <p:nvGrpSpPr>
@@ -3179,14 +3157,7 @@
         <p:cNvGrpSpPr/>
         <p:nvPr/>
       </p:nvGrpSpPr>
-      <p:grpSpPr>
-        <a:xfrm>
-          <a:off x="0" y="0"/>
-          <a:ext cx="0" cy="0"/>
-          <a:chOff x="0" y="0"/>
-          <a:chExt cx="0" cy="0"/>
-        </a:xfrm>
-      </p:grpSpPr>
+      <p:grpSpPr/>
       <p:sp>
         <p:nvSpPr>
           <p:cNvPr id="2" name="Title 1"/>
@@ -3268,7 +3239,7 @@
 </file>
 
 <file path=ppt/slides/slide3.xml><?xml version="1.0" encoding="utf-8"?>
-<p:sld xmlns:a="http://schemas.openxmlformats.org/drawingml/2006/main" xmlns:r="http://schemas.openxmlformats.org/officeDocument/2006/relationships" xmlns:p="http://schemas.openxmlformats.org/presentationml/2006/main">
+<p:sld xmlns:a="http://schemas.openxmlformats.org/drawingml/2006/main" xmlns:p="http://schemas.openxmlformats.org/presentationml/2006/main" xmlns:r="http://schemas.openxmlformats.org/officeDocument/2006/relationships">
   <p:cSld>
     <p:spTree>
       <p:nvGrpSpPr>
@@ -3276,14 +3247,7 @@
         <p:cNvGrpSpPr/>
         <p:nvPr/>
       </p:nvGrpSpPr>
-      <p:grpSpPr>
-        <a:xfrm>
-          <a:off x="0" y="0"/>
-          <a:ext cx="0" cy="0"/>
-          <a:chOff x="0" y="0"/>
-          <a:chExt cx="0" cy="0"/>
-        </a:xfrm>
-      </p:grpSpPr>
+      <p:grpSpPr/>
       <p:sp>
         <p:nvSpPr>
           <p:cNvPr id="2" name="Title 1"/>
@@ -3300,7 +3264,7 @@
           <a:lstStyle/>
           <a:p>
             <a:r>
-              <a:t>시장 환경 분석</a:t>
+              <a:t>2025년 실적 요약</a:t>
             </a:r>
           </a:p>
         </p:txBody>
@@ -3317,51 +3281,36 @@
         </p:nvSpPr>
         <p:spPr/>
         <p:txBody>
-          <a:bodyPr>
-            <a:normAutofit fontScale="92500" lnSpcReduction="20000"/>
-          </a:bodyPr>
-          <a:lstStyle/>
-          <a:p>
-            <a:r>
-              <a:t>기회 요인:</a:t>
-            </a:r>
-          </a:p>
-          <a:p>
-            <a:r>
-              <a:t>• AI/자동화 시장 연평균 35% 성장</a:t>
-            </a:r>
-          </a:p>
-          <a:p>
-            <a:r>
-              <a:t>• 기업 DX 투자 확대 추세</a:t>
-            </a:r>
-          </a:p>
-          <a:p>
-            <a:r>
-              <a:t>• 정부 AI 바우처 사업 확대</a:t>
-            </a:r>
-          </a:p>
-          <a:p>
-            <a:endParaRPr/>
-          </a:p>
-          <a:p>
-            <a:r>
-              <a:t>위협 요인:</a:t>
-            </a:r>
-          </a:p>
-          <a:p>
-            <a:r>
-              <a:t>• 대기업 시장 진입 (삼성SDS, LG CNS)</a:t>
-            </a:r>
-          </a:p>
-          <a:p>
-            <a:r>
-              <a:t>• 글로벌 SaaS 경쟁 심화</a:t>
-            </a:r>
-          </a:p>
-          <a:p>
-            <a:r>
-              <a:t>• 인력 확보 경쟁 치열</a:t>
+          <a:bodyPr/>
+          <a:lstStyle/>
+          <a:p>
+            <a:r>
+              <a:t>• 매출: 42억원 (전년 대비 +12%)</a:t>
+            </a:r>
+          </a:p>
+          <a:p>
+            <a:r>
+              <a:t>• 영업이익: 6.3억원 (이익률 15%)</a:t>
+            </a:r>
+          </a:p>
+          <a:p>
+            <a:r>
+              <a:t>• 신규 고객: 23개사 (목표 20개사 대비 115% 달성)</a:t>
+            </a:r>
+          </a:p>
+          <a:p>
+            <a:r>
+              <a:t>• 기존 고객 재계약률: 92%</a:t>
+            </a:r>
+          </a:p>
+          <a:p>
+            <a:r>
+              <a:t>• 해외매출 비중: 16% (전년 11%에서 성장)</a:t>
+            </a:r>
+          </a:p>
+          <a:p>
+            <a:r>
+              <a:t>• 직원 수: 48명 → 56명 (+17%)</a:t>
             </a:r>
           </a:p>
         </p:txBody>
@@ -3375,7 +3324,7 @@
 </file>
 
 <file path=ppt/slides/slide4.xml><?xml version="1.0" encoding="utf-8"?>
-<p:sld xmlns:a="http://schemas.openxmlformats.org/drawingml/2006/main" xmlns:r="http://schemas.openxmlformats.org/officeDocument/2006/relationships" xmlns:p="http://schemas.openxmlformats.org/presentationml/2006/main">
+<p:sld xmlns:a="http://schemas.openxmlformats.org/drawingml/2006/main" xmlns:p="http://schemas.openxmlformats.org/presentationml/2006/main" xmlns:r="http://schemas.openxmlformats.org/officeDocument/2006/relationships">
   <p:cSld>
     <p:spTree>
       <p:nvGrpSpPr>
@@ -3383,14 +3332,7 @@
         <p:cNvGrpSpPr/>
         <p:nvPr/>
       </p:nvGrpSpPr>
-      <p:grpSpPr>
-        <a:xfrm>
-          <a:off x="0" y="0"/>
-          <a:ext cx="0" cy="0"/>
-          <a:chOff x="0" y="0"/>
-          <a:chExt cx="0" cy="0"/>
-        </a:xfrm>
-      </p:grpSpPr>
+      <p:grpSpPr/>
       <p:sp>
         <p:nvSpPr>
           <p:cNvPr id="2" name="Title 1"/>
@@ -3407,7 +3349,7 @@
           <a:lstStyle/>
           <a:p>
             <a:r>
-              <a:t>2026년 사업 목표</a:t>
+              <a:t>시장 환경 분석</a:t>
             </a:r>
           </a:p>
         </p:txBody>
@@ -3424,51 +3366,47 @@
         </p:nvSpPr>
         <p:spPr/>
         <p:txBody>
-          <a:bodyPr>
-            <a:normAutofit fontScale="92500" lnSpcReduction="20000"/>
-          </a:bodyPr>
-          <a:lstStyle/>
-          <a:p>
-            <a:r>
-              <a:t>매출 목표: 50억원 (+19%)</a:t>
-            </a:r>
-          </a:p>
-          <a:p>
-            <a:r>
-              <a:t>영업이익 목표: 8억원 (이익률 16%)</a:t>
-            </a:r>
-          </a:p>
-          <a:p>
-            <a:r>
-              <a:t>신규 고객: 30개사</a:t>
-            </a:r>
-          </a:p>
-          <a:p>
-            <a:r>
-              <a:t>해외매출 비중: 20%</a:t>
-            </a:r>
-          </a:p>
-          <a:p>
-            <a:endParaRPr/>
-          </a:p>
-          <a:p>
-            <a:r>
-              <a:t>핵심 전략:</a:t>
-            </a:r>
-          </a:p>
-          <a:p>
-            <a:r>
-              <a:t>1. AI 솔루션 신사업 런칭</a:t>
-            </a:r>
-          </a:p>
-          <a:p>
-            <a:r>
-              <a:t>2. 중견기업 시장 집중 공략</a:t>
-            </a:r>
-          </a:p>
-          <a:p>
-            <a:r>
-              <a:t>3. 파트너 생태계 확대</a:t>
+          <a:bodyPr/>
+          <a:lstStyle/>
+          <a:p>
+            <a:r>
+              <a:t>기회 요인:</a:t>
+            </a:r>
+          </a:p>
+          <a:p>
+            <a:r>
+              <a:t>• AI/자동화 시장 연평균 35% 성장</a:t>
+            </a:r>
+          </a:p>
+          <a:p>
+            <a:r>
+              <a:t>• 기업 DX 투자 확대 추세</a:t>
+            </a:r>
+          </a:p>
+          <a:p>
+            <a:r>
+              <a:t>• 정부 AI 바우처 사업 확대</a:t>
+            </a:r>
+          </a:p>
+          <a:p/>
+          <a:p>
+            <a:r>
+              <a:t>위협 요인:</a:t>
+            </a:r>
+          </a:p>
+          <a:p>
+            <a:r>
+              <a:t>• 대기업 시장 진입 (삼성SDS, LG CNS)</a:t>
+            </a:r>
+          </a:p>
+          <a:p>
+            <a:r>
+              <a:t>• 글로벌 SaaS 경쟁 심화</a:t>
+            </a:r>
+          </a:p>
+          <a:p>
+            <a:r>
+              <a:t>• 인력 확보 경쟁 치열</a:t>
             </a:r>
           </a:p>
         </p:txBody>
@@ -3482,7 +3420,7 @@
 </file>
 
 <file path=ppt/slides/slide5.xml><?xml version="1.0" encoding="utf-8"?>
-<p:sld xmlns:a="http://schemas.openxmlformats.org/drawingml/2006/main" xmlns:r="http://schemas.openxmlformats.org/officeDocument/2006/relationships" xmlns:p="http://schemas.openxmlformats.org/presentationml/2006/main">
+<p:sld xmlns:a="http://schemas.openxmlformats.org/drawingml/2006/main" xmlns:p="http://schemas.openxmlformats.org/presentationml/2006/main" xmlns:r="http://schemas.openxmlformats.org/officeDocument/2006/relationships">
   <p:cSld>
     <p:spTree>
       <p:nvGrpSpPr>
@@ -3490,14 +3428,7 @@
         <p:cNvGrpSpPr/>
         <p:nvPr/>
       </p:nvGrpSpPr>
-      <p:grpSpPr>
-        <a:xfrm>
-          <a:off x="0" y="0"/>
-          <a:ext cx="0" cy="0"/>
-          <a:chOff x="0" y="0"/>
-          <a:chExt cx="0" cy="0"/>
-        </a:xfrm>
-      </p:grpSpPr>
+      <p:grpSpPr/>
       <p:sp>
         <p:nvSpPr>
           <p:cNvPr id="2" name="Title 1"/>
@@ -3514,6 +3445,102 @@
           <a:lstStyle/>
           <a:p>
             <a:r>
+              <a:t>2026년 사업 목표</a:t>
+            </a:r>
+          </a:p>
+        </p:txBody>
+      </p:sp>
+      <p:sp>
+        <p:nvSpPr>
+          <p:cNvPr id="3" name="Content Placeholder 2"/>
+          <p:cNvSpPr>
+            <a:spLocks noGrp="1"/>
+          </p:cNvSpPr>
+          <p:nvPr>
+            <p:ph idx="1"/>
+          </p:nvPr>
+        </p:nvSpPr>
+        <p:spPr/>
+        <p:txBody>
+          <a:bodyPr/>
+          <a:lstStyle/>
+          <a:p>
+            <a:r>
+              <a:t>매출 목표: 50억원 (+19%)</a:t>
+            </a:r>
+          </a:p>
+          <a:p>
+            <a:r>
+              <a:t>영업이익 목표: 8억원 (이익률 16%)</a:t>
+            </a:r>
+          </a:p>
+          <a:p>
+            <a:r>
+              <a:t>신규 고객: 30개사</a:t>
+            </a:r>
+          </a:p>
+          <a:p>
+            <a:r>
+              <a:t>해외매출 비중: 20%</a:t>
+            </a:r>
+          </a:p>
+          <a:p/>
+          <a:p>
+            <a:r>
+              <a:t>핵심 전략:</a:t>
+            </a:r>
+          </a:p>
+          <a:p>
+            <a:r>
+              <a:t>1. AI 솔루션 신사업 런칭</a:t>
+            </a:r>
+          </a:p>
+          <a:p>
+            <a:r>
+              <a:t>2. 중견기업 시장 집중 공략</a:t>
+            </a:r>
+          </a:p>
+          <a:p>
+            <a:r>
+              <a:t>3. 파트너 생태계 확대</a:t>
+            </a:r>
+          </a:p>
+        </p:txBody>
+      </p:sp>
+    </p:spTree>
+  </p:cSld>
+  <p:clrMapOvr>
+    <a:masterClrMapping/>
+  </p:clrMapOvr>
+</p:sld>
+</file>
+
+<file path=ppt/slides/slide6.xml><?xml version="1.0" encoding="utf-8"?>
+<p:sld xmlns:a="http://schemas.openxmlformats.org/drawingml/2006/main" xmlns:p="http://schemas.openxmlformats.org/presentationml/2006/main" xmlns:r="http://schemas.openxmlformats.org/officeDocument/2006/relationships">
+  <p:cSld>
+    <p:spTree>
+      <p:nvGrpSpPr>
+        <p:cNvPr id="1" name=""/>
+        <p:cNvGrpSpPr/>
+        <p:nvPr/>
+      </p:nvGrpSpPr>
+      <p:grpSpPr/>
+      <p:sp>
+        <p:nvSpPr>
+          <p:cNvPr id="2" name="Title 1"/>
+          <p:cNvSpPr>
+            <a:spLocks noGrp="1"/>
+          </p:cNvSpPr>
+          <p:nvPr>
+            <p:ph type="title"/>
+          </p:nvPr>
+        </p:nvSpPr>
+        <p:spPr/>
+        <p:txBody>
+          <a:bodyPr/>
+          <a:lstStyle/>
+          <a:p>
+            <a:r>
               <a:t>투자 계획</a:t>
             </a:r>
           </a:p>
@@ -3553,9 +3580,7 @@
               <a:t>• 인프라: 1.5억원 (클라우드 전환)</a:t>
             </a:r>
           </a:p>
-          <a:p>
-            <a:endParaRPr/>
-          </a:p>
+          <a:p/>
           <a:p>
             <a:r>
               <a:t>총 투자 규모: 11.5억원</a:t>
